--- a/output/FemaleDiseasPrevalence.pptx
+++ b/output/FemaleDiseasPrevalence.pptx
@@ -230,7 +230,7 @@
         </c:scaling>
         <c:delete val="0"/>
         <c:axPos val="l"/>
-        <c:majorTickMark val="out"/>
+        <c:majorTickMark val="none"/>
         <c:minorTickMark val="none"/>
         <c:tickLblPos val="nextTo"/>
         <c:txPr>
@@ -262,7 +262,6 @@
         </c:scaling>
         <c:delete/>
         <c:axPos val="b"/>
-        <c:majorGridlines/>
         <c:majorTickMark val="none"/>
         <c:minorTickMark val="none"/>
         <c:tickLblPos val="nextTo"/>
@@ -3274,7 +3273,7 @@
     <p:bg>
       <p:bgPr>
         <a:solidFill>
-          <a:srgbClr val="FFF8F5"/>
+          <a:srgbClr val="3D2B56"/>
         </a:solidFill>
         <a:effectLst/>
       </p:bgPr>
@@ -3294,8 +3293,8 @@
         </p:nvSpPr>
         <p:spPr>
           <a:xfrm>
-            <a:off x="822960" y="640080"/>
-            <a:ext cx="10515600" cy="365760"/>
+            <a:off x="822960" y="1463040"/>
+            <a:ext cx="10515600" cy="1828800"/>
           </a:xfrm>
           <a:prstGeom prst="rect">
             <a:avLst/>
@@ -3310,13 +3309,14 @@
           <a:p>
             <a:pPr algn="l"/>
             <a:r>
-              <a:rPr sz="1400" b="1">
-                <a:solidFill>
-                  <a:srgbClr val="7B5EA7"/>
-                </a:solidFill>
-                <a:latin typeface="Calibri"/>
-              </a:rPr>
-              <a:t>A 3-MINUTE STORY</a:t>
+              <a:rPr sz="4400" b="1">
+                <a:solidFill>
+                  <a:srgbClr val="FFFFFF"/>
+                </a:solidFill>
+                <a:latin typeface="Calibri"/>
+              </a:rPr>
+              <a:t>Diabetes was the question.
+The answer is much bigger than diabetes.</a:t>
             </a:r>
           </a:p>
         </p:txBody>
@@ -3329,8 +3329,8 @@
         </p:nvSpPr>
         <p:spPr>
           <a:xfrm>
-            <a:off x="822960" y="1280160"/>
-            <a:ext cx="10515600" cy="1645920"/>
+            <a:off x="822960" y="3931920"/>
+            <a:ext cx="10515600" cy="2194560"/>
           </a:xfrm>
           <a:prstGeom prst="rect">
             <a:avLst/>
@@ -3345,14 +3345,13 @@
           <a:p>
             <a:pPr algn="l"/>
             <a:r>
-              <a:rPr sz="4400" b="1">
-                <a:solidFill>
-                  <a:srgbClr val="3D2B56"/>
-                </a:solidFill>
-                <a:latin typeface="Calibri"/>
-              </a:rPr>
-              <a:t>Diabetes was the question.
-The answer is much bigger than diabetes.</a:t>
+              <a:rPr sz="2000" b="0">
+                <a:solidFill>
+                  <a:srgbClr val="FFFFFF"/>
+                </a:solidFill>
+                <a:latin typeface="Calibri"/>
+              </a:rPr>
+              <a:t>The same female-skewed health burden that shows up in Zambia's diabetes numbers runs through five of the most disabling diseases of modern life — and the world still designs medicine, research and screening as if it didn't.</a:t>
             </a:r>
           </a:p>
         </p:txBody>
@@ -3365,8 +3364,8 @@
         </p:nvSpPr>
         <p:spPr>
           <a:xfrm>
-            <a:off x="822960" y="3566160"/>
-            <a:ext cx="548640" cy="365760"/>
+            <a:off x="822960" y="6263640"/>
+            <a:ext cx="10515600" cy="365760"/>
           </a:xfrm>
           <a:prstGeom prst="rect">
             <a:avLst/>
@@ -3381,79 +3380,9 @@
           <a:p>
             <a:pPr algn="l"/>
             <a:r>
-              <a:rPr sz="1100" b="1">
+              <a:rPr sz="1100" b="0">
                 <a:solidFill>
                   <a:srgbClr val="E8A838"/>
-                </a:solidFill>
-                <a:latin typeface="Calibri"/>
-              </a:rPr>
-              <a:t>Big Idea</a:t>
-            </a:r>
-          </a:p>
-        </p:txBody>
-      </p:sp>
-      <p:sp>
-        <p:nvSpPr>
-          <p:cNvPr id="5" name="TextBox 4"/>
-          <p:cNvSpPr txBox="1"/>
-          <p:nvPr/>
-        </p:nvSpPr>
-        <p:spPr>
-          <a:xfrm>
-            <a:off x="822960" y="3977639"/>
-            <a:ext cx="10515600" cy="2011680"/>
-          </a:xfrm>
-          <a:prstGeom prst="rect">
-            <a:avLst/>
-          </a:prstGeom>
-          <a:noFill/>
-        </p:spPr>
-        <p:txBody>
-          <a:bodyPr wrap="square" lIns="0" rIns="0" tIns="0" bIns="0" anchor="t">
-            <a:spAutoFit/>
-          </a:bodyPr>
-          <a:lstStyle/>
-          <a:p>
-            <a:pPr algn="l"/>
-            <a:r>
-              <a:rPr sz="2000" b="0">
-                <a:solidFill>
-                  <a:srgbClr val="2C2C2C"/>
-                </a:solidFill>
-                <a:latin typeface="Calibri"/>
-              </a:rPr>
-              <a:t>The same female-skewed health burden that shows up in Zambia's diabetes numbers runs through five of the most disabling diseases of modern life — and the world still designs medicine, research and screening as if it didn't.</a:t>
-            </a:r>
-          </a:p>
-        </p:txBody>
-      </p:sp>
-      <p:sp>
-        <p:nvSpPr>
-          <p:cNvPr id="6" name="TextBox 5"/>
-          <p:cNvSpPr txBox="1"/>
-          <p:nvPr/>
-        </p:nvSpPr>
-        <p:spPr>
-          <a:xfrm>
-            <a:off x="822960" y="6217920"/>
-            <a:ext cx="10515600" cy="365760"/>
-          </a:xfrm>
-          <a:prstGeom prst="rect">
-            <a:avLst/>
-          </a:prstGeom>
-          <a:noFill/>
-        </p:spPr>
-        <p:txBody>
-          <a:bodyPr wrap="square" lIns="0" rIns="0" tIns="0" bIns="0" anchor="t">
-            <a:spAutoFit/>
-          </a:bodyPr>
-          <a:lstStyle/>
-          <a:p>
-            <a:pPr algn="l"/>
-            <a:r>
-              <a:rPr sz="1100" b="0">
-                <a:solidFill>
-                  <a:srgbClr val="888888"/>
                 </a:solidFill>
                 <a:latin typeface="Calibri"/>
               </a:rPr>
@@ -3765,8 +3694,8 @@
         </p:nvSpPr>
         <p:spPr>
           <a:xfrm>
-            <a:off x="822960" y="640080"/>
-            <a:ext cx="10515600" cy="365760"/>
+            <a:off x="822960" y="1051560"/>
+            <a:ext cx="10515600" cy="502920"/>
           </a:xfrm>
           <a:prstGeom prst="rect">
             <a:avLst/>
@@ -3781,13 +3710,13 @@
           <a:p>
             <a:pPr algn="l"/>
             <a:r>
-              <a:rPr sz="1200" b="1">
-                <a:solidFill>
-                  <a:srgbClr val="7B5EA7"/>
-                </a:solidFill>
-                <a:latin typeface="Calibri"/>
-              </a:rPr>
-              <a:t>THE HOOK  ·  Diabesity Zambia</a:t>
+              <a:rPr sz="2200" b="1">
+                <a:solidFill>
+                  <a:srgbClr val="3D2B56"/>
+                </a:solidFill>
+                <a:latin typeface="Calibri"/>
+              </a:rPr>
+              <a:t>Zambia's 2017 STEPS survey</a:t>
             </a:r>
           </a:p>
         </p:txBody>
@@ -3800,8 +3729,8 @@
         </p:nvSpPr>
         <p:spPr>
           <a:xfrm>
-            <a:off x="822960" y="1325880"/>
-            <a:ext cx="10515600" cy="502920"/>
+            <a:off x="822960" y="2057400"/>
+            <a:ext cx="10515600" cy="2011680"/>
           </a:xfrm>
           <a:prstGeom prst="rect">
             <a:avLst/>
@@ -3816,13 +3745,13 @@
           <a:p>
             <a:pPr algn="l"/>
             <a:r>
-              <a:rPr sz="2200" b="1">
-                <a:solidFill>
-                  <a:srgbClr val="3D2B56"/>
-                </a:solidFill>
-                <a:latin typeface="Calibri"/>
-              </a:rPr>
-              <a:t>Zambia's 2017 STEPS survey</a:t>
+              <a:rPr sz="11000" b="1">
+                <a:solidFill>
+                  <a:srgbClr val="E8A838"/>
+                </a:solidFill>
+                <a:latin typeface="Calibri"/>
+              </a:rPr>
+              <a:t>24%</a:t>
             </a:r>
           </a:p>
         </p:txBody>
@@ -3835,8 +3764,8 @@
         </p:nvSpPr>
         <p:spPr>
           <a:xfrm>
-            <a:off x="822960" y="2057400"/>
-            <a:ext cx="10515600" cy="2011680"/>
+            <a:off x="822960" y="4297680"/>
+            <a:ext cx="10515600" cy="1645920"/>
           </a:xfrm>
           <a:prstGeom prst="rect">
             <a:avLst/>
@@ -3851,13 +3780,13 @@
           <a:p>
             <a:pPr algn="l"/>
             <a:r>
-              <a:rPr sz="11000" b="1">
-                <a:solidFill>
-                  <a:srgbClr val="E8A838"/>
-                </a:solidFill>
-                <a:latin typeface="Calibri"/>
-              </a:rPr>
-              <a:t>24%</a:t>
+              <a:rPr sz="2200" b="0">
+                <a:solidFill>
+                  <a:srgbClr val="2C2C2C"/>
+                </a:solidFill>
+                <a:latin typeface="Calibri"/>
+              </a:rPr>
+              <a:t>more women than men carried multiple non-communicable disease risk factors — and female diabetes prevalence ran 3.0% vs 2.1% in men.</a:t>
             </a:r>
           </a:p>
         </p:txBody>
@@ -3865,41 +3794,6 @@
       <p:sp>
         <p:nvSpPr>
           <p:cNvPr id="5" name="TextBox 4"/>
-          <p:cNvSpPr txBox="1"/>
-          <p:nvPr/>
-        </p:nvSpPr>
-        <p:spPr>
-          <a:xfrm>
-            <a:off x="822960" y="4297680"/>
-            <a:ext cx="10515600" cy="1645920"/>
-          </a:xfrm>
-          <a:prstGeom prst="rect">
-            <a:avLst/>
-          </a:prstGeom>
-          <a:noFill/>
-        </p:spPr>
-        <p:txBody>
-          <a:bodyPr wrap="square" lIns="0" rIns="0" tIns="0" bIns="0" anchor="t">
-            <a:spAutoFit/>
-          </a:bodyPr>
-          <a:lstStyle/>
-          <a:p>
-            <a:pPr algn="l"/>
-            <a:r>
-              <a:rPr sz="2200" b="0">
-                <a:solidFill>
-                  <a:srgbClr val="2C2C2C"/>
-                </a:solidFill>
-                <a:latin typeface="Calibri"/>
-              </a:rPr>
-              <a:t>more women than men carried multiple non-communicable disease risk factors — and female diabetes prevalence ran 3.0% vs 2.1% in men.</a:t>
-            </a:r>
-          </a:p>
-        </p:txBody>
-      </p:sp>
-      <p:sp>
-        <p:nvSpPr>
-          <p:cNvPr id="6" name="TextBox 5"/>
           <p:cNvSpPr txBox="1"/>
           <p:nvPr/>
         </p:nvSpPr>
@@ -3966,8 +3860,8 @@
         </p:nvSpPr>
         <p:spPr>
           <a:xfrm>
-            <a:off x="822960" y="502920"/>
-            <a:ext cx="10515600" cy="365760"/>
+            <a:off x="822960" y="1051560"/>
+            <a:ext cx="10515600" cy="822960"/>
           </a:xfrm>
           <a:prstGeom prst="rect">
             <a:avLst/>
@@ -3982,42 +3876,7 @@
           <a:p>
             <a:pPr algn="l"/>
             <a:r>
-              <a:rPr sz="1200" b="1">
-                <a:solidFill>
-                  <a:srgbClr val="7B5EA7"/>
-                </a:solidFill>
-                <a:latin typeface="Calibri"/>
-              </a:rPr>
-              <a:t>THE LANDSCAPE</a:t>
-            </a:r>
-          </a:p>
-        </p:txBody>
-      </p:sp>
-      <p:sp>
-        <p:nvSpPr>
-          <p:cNvPr id="3" name="TextBox 2"/>
-          <p:cNvSpPr txBox="1"/>
-          <p:nvPr/>
-        </p:nvSpPr>
-        <p:spPr>
-          <a:xfrm>
-            <a:off x="822960" y="914400"/>
-            <a:ext cx="10515600" cy="640080"/>
-          </a:xfrm>
-          <a:prstGeom prst="rect">
-            <a:avLst/>
-          </a:prstGeom>
-          <a:noFill/>
-        </p:spPr>
-        <p:txBody>
-          <a:bodyPr wrap="square" lIns="0" rIns="0" tIns="0" bIns="0" anchor="t">
-            <a:spAutoFit/>
-          </a:bodyPr>
-          <a:lstStyle/>
-          <a:p>
-            <a:pPr algn="l"/>
-            <a:r>
-              <a:rPr sz="2600" b="1">
+              <a:rPr sz="2800" b="1">
                 <a:solidFill>
                   <a:srgbClr val="3D2B56"/>
                 </a:solidFill>
@@ -4030,15 +3889,15 @@
       </p:sp>
       <p:graphicFrame>
         <p:nvGraphicFramePr>
-          <p:cNvPr id="4" name="Chart 3"/>
+          <p:cNvPr id="3" name="Chart 2"/>
           <p:cNvGraphicFramePr>
             <a:graphicFrameLocks noGrp="1"/>
           </p:cNvGraphicFramePr>
           <p:nvPr/>
         </p:nvGraphicFramePr>
         <p:xfrm>
-          <a:off x="822960" y="1783080"/>
-          <a:ext cx="10515600" cy="4480560"/>
+          <a:off x="822960" y="2194560"/>
+          <a:ext cx="10515600" cy="4023360"/>
         </p:xfrm>
         <a:graphic>
           <a:graphicData uri="http://schemas.openxmlformats.org/drawingml/2006/chart">
@@ -4048,14 +3907,14 @@
       </p:graphicFrame>
       <p:sp>
         <p:nvSpPr>
-          <p:cNvPr id="5" name="TextBox 4"/>
+          <p:cNvPr id="4" name="TextBox 3"/>
           <p:cNvSpPr txBox="1"/>
           <p:nvPr/>
         </p:nvSpPr>
         <p:spPr>
           <a:xfrm>
-            <a:off x="822960" y="6263640"/>
-            <a:ext cx="10515600" cy="274320"/>
+            <a:off x="457200" y="6446520"/>
+            <a:ext cx="10424160" cy="320040"/>
           </a:xfrm>
           <a:prstGeom prst="rect">
             <a:avLst/>
@@ -4070,7 +3929,7 @@
           <a:p>
             <a:pPr algn="l"/>
             <a:r>
-              <a:rPr sz="1100" b="0">
+              <a:rPr sz="900" b="0">
                 <a:solidFill>
                   <a:srgbClr val="888888"/>
                 </a:solidFill>
@@ -4116,7 +3975,7 @@
         <p:spPr>
           <a:xfrm>
             <a:off x="822960" y="502920"/>
-            <a:ext cx="1645920" cy="365760"/>
+            <a:ext cx="2194560" cy="365760"/>
           </a:xfrm>
           <a:prstGeom prst="roundRect">
             <a:avLst>
@@ -4170,7 +4029,7 @@
         <p:spPr>
           <a:xfrm>
             <a:off x="822960" y="1051560"/>
-            <a:ext cx="10515600" cy="731520"/>
+            <a:ext cx="10515600" cy="822960"/>
           </a:xfrm>
           <a:prstGeom prst="rect">
             <a:avLst/>
@@ -4185,7 +4044,7 @@
           <a:p>
             <a:pPr algn="l"/>
             <a:r>
-              <a:rPr sz="3400" b="1">
+              <a:rPr sz="2800" b="1">
                 <a:solidFill>
                   <a:srgbClr val="3D2B56"/>
                 </a:solidFill>
@@ -4204,8 +4063,8 @@
         </p:nvSpPr>
         <p:spPr>
           <a:xfrm>
-            <a:off x="822960" y="1828800"/>
-            <a:ext cx="10515600" cy="640080"/>
+            <a:off x="822960" y="2194560"/>
+            <a:ext cx="5486400" cy="411480"/>
           </a:xfrm>
           <a:prstGeom prst="rect">
             <a:avLst/>
@@ -4220,13 +4079,13 @@
           <a:p>
             <a:pPr algn="l"/>
             <a:r>
-              <a:rPr sz="1600" b="0">
-                <a:solidFill>
-                  <a:srgbClr val="2C2C2C"/>
-                </a:solidFill>
-                <a:latin typeface="Calibri"/>
-              </a:rPr>
-              <a:t>A chronic autoimmune disease where the body's immune system attacks its own tissues — skin, joints, kidneys, heart and brain.</a:t>
+              <a:rPr sz="1400" b="0">
+                <a:solidFill>
+                  <a:srgbClr val="7B5EA7"/>
+                </a:solidFill>
+                <a:latin typeface="Calibri"/>
+              </a:rPr>
+              <a:t>female-to-male ratio</a:t>
             </a:r>
           </a:p>
         </p:txBody>
@@ -4239,8 +4098,8 @@
         </p:nvSpPr>
         <p:spPr>
           <a:xfrm>
-            <a:off x="822960" y="2926080"/>
-            <a:ext cx="10515600" cy="1828800"/>
+            <a:off x="822960" y="2606040"/>
+            <a:ext cx="5486400" cy="1828800"/>
           </a:xfrm>
           <a:prstGeom prst="rect">
             <a:avLst/>
@@ -4253,7 +4112,7 @@
           </a:bodyPr>
           <a:lstStyle/>
           <a:p>
-            <a:pPr algn="ctr"/>
+            <a:pPr algn="l"/>
             <a:r>
               <a:rPr sz="16000" b="1">
                 <a:solidFill>
@@ -4274,8 +4133,8 @@
         </p:nvSpPr>
         <p:spPr>
           <a:xfrm>
-            <a:off x="822960" y="5120640"/>
-            <a:ext cx="10515600" cy="548640"/>
+            <a:off x="6583680" y="2194560"/>
+            <a:ext cx="5029200" cy="2194560"/>
           </a:xfrm>
           <a:prstGeom prst="rect">
             <a:avLst/>
@@ -4288,15 +4147,15 @@
           </a:bodyPr>
           <a:lstStyle/>
           <a:p>
-            <a:pPr algn="ctr"/>
-            <a:r>
-              <a:rPr sz="1400" b="0">
-                <a:solidFill>
-                  <a:srgbClr val="7B5EA7"/>
-                </a:solidFill>
-                <a:latin typeface="Calibri"/>
-              </a:rPr>
-              <a:t>female-to-male prevalence</a:t>
+            <a:pPr algn="l"/>
+            <a:r>
+              <a:rPr sz="1600" b="0">
+                <a:solidFill>
+                  <a:srgbClr val="2C2C2C"/>
+                </a:solidFill>
+                <a:latin typeface="Calibri"/>
+              </a:rPr>
+              <a:t>A chronic autoimmune disease where the body's immune system attacks its own tissues — skin, joints, kidneys, heart and brain.</a:t>
             </a:r>
           </a:p>
         </p:txBody>
@@ -4309,8 +4168,8 @@
         </p:nvSpPr>
         <p:spPr>
           <a:xfrm>
-            <a:off x="822960" y="5669280"/>
-            <a:ext cx="10515600" cy="548640"/>
+            <a:off x="6583680" y="4572000"/>
+            <a:ext cx="5029200" cy="1737360"/>
           </a:xfrm>
           <a:prstGeom prst="rect">
             <a:avLst/>
@@ -4323,9 +4182,9 @@
           </a:bodyPr>
           <a:lstStyle/>
           <a:p>
-            <a:pPr algn="ctr"/>
-            <a:r>
-              <a:rPr sz="2000" b="1">
+            <a:pPr algn="l"/>
+            <a:r>
+              <a:rPr sz="2200" b="1">
                 <a:solidFill>
                   <a:srgbClr val="3D2B56"/>
                 </a:solidFill>
@@ -4441,7 +4300,7 @@
         <p:spPr>
           <a:xfrm>
             <a:off x="822960" y="502920"/>
-            <a:ext cx="1828800" cy="365760"/>
+            <a:ext cx="2194560" cy="365760"/>
           </a:xfrm>
           <a:prstGeom prst="roundRect">
             <a:avLst>
@@ -4494,8 +4353,8 @@
         </p:nvSpPr>
         <p:spPr>
           <a:xfrm>
-            <a:off x="822960" y="1828800"/>
-            <a:ext cx="5486400" cy="457200"/>
+            <a:off x="822960" y="1051560"/>
+            <a:ext cx="10515600" cy="822960"/>
           </a:xfrm>
           <a:prstGeom prst="rect">
             <a:avLst/>
@@ -4510,13 +4369,13 @@
           <a:p>
             <a:pPr algn="l"/>
             <a:r>
-              <a:rPr sz="1400" b="0">
-                <a:solidFill>
-                  <a:srgbClr val="7B5EA7"/>
-                </a:solidFill>
-                <a:latin typeface="Calibri"/>
-              </a:rPr>
-              <a:t>female-to-male ratio</a:t>
+              <a:rPr sz="2800" b="1">
+                <a:solidFill>
+                  <a:srgbClr val="3D2B56"/>
+                </a:solidFill>
+                <a:latin typeface="Calibri"/>
+              </a:rPr>
+              <a:t>Osteoporosis</a:t>
             </a:r>
           </a:p>
         </p:txBody>
@@ -4529,8 +4388,8 @@
         </p:nvSpPr>
         <p:spPr>
           <a:xfrm>
-            <a:off x="822960" y="2286000"/>
-            <a:ext cx="5486400" cy="1828800"/>
+            <a:off x="822960" y="2194560"/>
+            <a:ext cx="5486400" cy="411480"/>
           </a:xfrm>
           <a:prstGeom prst="rect">
             <a:avLst/>
@@ -4545,13 +4404,13 @@
           <a:p>
             <a:pPr algn="l"/>
             <a:r>
-              <a:rPr sz="17000" b="1">
-                <a:solidFill>
-                  <a:srgbClr val="E8A838"/>
-                </a:solidFill>
-                <a:latin typeface="Calibri"/>
-              </a:rPr>
-              <a:t>4.5:1</a:t>
+              <a:rPr sz="1400" b="0">
+                <a:solidFill>
+                  <a:srgbClr val="7B5EA7"/>
+                </a:solidFill>
+                <a:latin typeface="Calibri"/>
+              </a:rPr>
+              <a:t>female-to-male ratio</a:t>
             </a:r>
           </a:p>
         </p:txBody>
@@ -4564,8 +4423,8 @@
         </p:nvSpPr>
         <p:spPr>
           <a:xfrm>
-            <a:off x="6583680" y="1188720"/>
-            <a:ext cx="5029200" cy="1005840"/>
+            <a:off x="822960" y="2606040"/>
+            <a:ext cx="5486400" cy="1828800"/>
           </a:xfrm>
           <a:prstGeom prst="rect">
             <a:avLst/>
@@ -4580,13 +4439,13 @@
           <a:p>
             <a:pPr algn="l"/>
             <a:r>
-              <a:rPr sz="3000" b="1">
-                <a:solidFill>
-                  <a:srgbClr val="3D2B56"/>
-                </a:solidFill>
-                <a:latin typeface="Calibri"/>
-              </a:rPr>
-              <a:t>Osteoporosis</a:t>
+              <a:rPr sz="16000" b="1">
+                <a:solidFill>
+                  <a:srgbClr val="E8A838"/>
+                </a:solidFill>
+                <a:latin typeface="Calibri"/>
+              </a:rPr>
+              <a:t>4.5:1</a:t>
             </a:r>
           </a:p>
         </p:txBody>
@@ -4599,8 +4458,8 @@
         </p:nvSpPr>
         <p:spPr>
           <a:xfrm>
-            <a:off x="6583680" y="2377440"/>
-            <a:ext cx="5029200" cy="1645920"/>
+            <a:off x="6583680" y="2194560"/>
+            <a:ext cx="5029200" cy="2194560"/>
           </a:xfrm>
           <a:prstGeom prst="rect">
             <a:avLst/>
@@ -4634,8 +4493,8 @@
         </p:nvSpPr>
         <p:spPr>
           <a:xfrm>
-            <a:off x="6583680" y="4389120"/>
-            <a:ext cx="5029200" cy="1645920"/>
+            <a:off x="6583680" y="4572000"/>
+            <a:ext cx="5029200" cy="1737360"/>
           </a:xfrm>
           <a:prstGeom prst="rect">
             <a:avLst/>
@@ -4766,7 +4625,7 @@
         <p:spPr>
           <a:xfrm>
             <a:off x="822960" y="502920"/>
-            <a:ext cx="1828800" cy="365760"/>
+            <a:ext cx="2194560" cy="365760"/>
           </a:xfrm>
           <a:prstGeom prst="roundRect">
             <a:avLst>
@@ -4820,7 +4679,7 @@
         <p:spPr>
           <a:xfrm>
             <a:off x="822960" y="1051560"/>
-            <a:ext cx="10515600" cy="320040"/>
+            <a:ext cx="10515600" cy="822960"/>
           </a:xfrm>
           <a:prstGeom prst="rect">
             <a:avLst/>
@@ -4835,13 +4694,13 @@
           <a:p>
             <a:pPr algn="l"/>
             <a:r>
-              <a:rPr sz="1400" b="0">
-                <a:solidFill>
-                  <a:srgbClr val="7B5EA7"/>
-                </a:solidFill>
-                <a:latin typeface="Calibri"/>
-              </a:rPr>
-              <a:t>female-to-male ratio</a:t>
+              <a:rPr sz="2800" b="1">
+                <a:solidFill>
+                  <a:srgbClr val="3D2B56"/>
+                </a:solidFill>
+                <a:latin typeface="Calibri"/>
+              </a:rPr>
+              <a:t>Migraine</a:t>
             </a:r>
           </a:p>
         </p:txBody>
@@ -4854,8 +4713,8 @@
         </p:nvSpPr>
         <p:spPr>
           <a:xfrm>
-            <a:off x="822960" y="1463040"/>
-            <a:ext cx="10515600" cy="1828800"/>
+            <a:off x="822960" y="2194560"/>
+            <a:ext cx="5486400" cy="411480"/>
           </a:xfrm>
           <a:prstGeom prst="rect">
             <a:avLst/>
@@ -4870,13 +4729,13 @@
           <a:p>
             <a:pPr algn="l"/>
             <a:r>
-              <a:rPr sz="17000" b="1">
-                <a:solidFill>
-                  <a:srgbClr val="E8A838"/>
-                </a:solidFill>
-                <a:latin typeface="Calibri"/>
-              </a:rPr>
-              <a:t>3:1</a:t>
+              <a:rPr sz="1400" b="0">
+                <a:solidFill>
+                  <a:srgbClr val="7B5EA7"/>
+                </a:solidFill>
+                <a:latin typeface="Calibri"/>
+              </a:rPr>
+              <a:t>female-to-male ratio</a:t>
             </a:r>
           </a:p>
         </p:txBody>
@@ -4889,8 +4748,8 @@
         </p:nvSpPr>
         <p:spPr>
           <a:xfrm>
-            <a:off x="822960" y="4023360"/>
-            <a:ext cx="10515600" cy="822960"/>
+            <a:off x="822960" y="2606040"/>
+            <a:ext cx="5486400" cy="1828800"/>
           </a:xfrm>
           <a:prstGeom prst="rect">
             <a:avLst/>
@@ -4905,13 +4764,13 @@
           <a:p>
             <a:pPr algn="l"/>
             <a:r>
-              <a:rPr sz="3000" b="1">
-                <a:solidFill>
-                  <a:srgbClr val="3D2B56"/>
-                </a:solidFill>
-                <a:latin typeface="Calibri"/>
-              </a:rPr>
-              <a:t>Migraine</a:t>
+              <a:rPr sz="16000" b="1">
+                <a:solidFill>
+                  <a:srgbClr val="E8A838"/>
+                </a:solidFill>
+                <a:latin typeface="Calibri"/>
+              </a:rPr>
+              <a:t>3:1</a:t>
             </a:r>
           </a:p>
         </p:txBody>
@@ -4924,8 +4783,8 @@
         </p:nvSpPr>
         <p:spPr>
           <a:xfrm>
-            <a:off x="822960" y="4846320"/>
-            <a:ext cx="10515600" cy="822960"/>
+            <a:off x="6583680" y="2194560"/>
+            <a:ext cx="5029200" cy="2194560"/>
           </a:xfrm>
           <a:prstGeom prst="rect">
             <a:avLst/>
@@ -4959,8 +4818,8 @@
         </p:nvSpPr>
         <p:spPr>
           <a:xfrm>
-            <a:off x="822960" y="5760720"/>
-            <a:ext cx="10515600" cy="548640"/>
+            <a:off x="6583680" y="4572000"/>
+            <a:ext cx="5029200" cy="1737360"/>
           </a:xfrm>
           <a:prstGeom prst="rect">
             <a:avLst/>
@@ -4975,7 +4834,7 @@
           <a:p>
             <a:pPr algn="l"/>
             <a:r>
-              <a:rPr sz="1800" b="1">
+              <a:rPr sz="2200" b="1">
                 <a:solidFill>
                   <a:srgbClr val="3D2B56"/>
                 </a:solidFill>
@@ -5144,8 +5003,8 @@
         </p:nvSpPr>
         <p:spPr>
           <a:xfrm>
-            <a:off x="822960" y="1188720"/>
-            <a:ext cx="5669280" cy="1005840"/>
+            <a:off x="822960" y="1051560"/>
+            <a:ext cx="10515600" cy="822960"/>
           </a:xfrm>
           <a:prstGeom prst="rect">
             <a:avLst/>
@@ -5160,7 +5019,7 @@
           <a:p>
             <a:pPr algn="l"/>
             <a:r>
-              <a:rPr sz="3000" b="1">
+              <a:rPr sz="2800" b="1">
                 <a:solidFill>
                   <a:srgbClr val="3D2B56"/>
                 </a:solidFill>
@@ -5179,8 +5038,8 @@
         </p:nvSpPr>
         <p:spPr>
           <a:xfrm>
-            <a:off x="822960" y="2377440"/>
-            <a:ext cx="5669280" cy="2286000"/>
+            <a:off x="822960" y="2194560"/>
+            <a:ext cx="5486400" cy="411480"/>
           </a:xfrm>
           <a:prstGeom prst="rect">
             <a:avLst/>
@@ -5195,13 +5054,13 @@
           <a:p>
             <a:pPr algn="l"/>
             <a:r>
-              <a:rPr sz="1600" b="0">
-                <a:solidFill>
-                  <a:srgbClr val="2C2C2C"/>
-                </a:solidFill>
-                <a:latin typeface="Calibri"/>
-              </a:rPr>
-              <a:t>A progressive brain disease that destroys memory and thinking — the most common cause of dementia in older adults.</a:t>
+              <a:rPr sz="1400" b="0">
+                <a:solidFill>
+                  <a:srgbClr val="7B5EA7"/>
+                </a:solidFill>
+                <a:latin typeface="Calibri"/>
+              </a:rPr>
+              <a:t>female-to-male ratio</a:t>
             </a:r>
           </a:p>
         </p:txBody>
@@ -5214,8 +5073,8 @@
         </p:nvSpPr>
         <p:spPr>
           <a:xfrm>
-            <a:off x="822960" y="4846320"/>
-            <a:ext cx="5669280" cy="1371600"/>
+            <a:off x="822960" y="2606040"/>
+            <a:ext cx="5486400" cy="1828800"/>
           </a:xfrm>
           <a:prstGeom prst="rect">
             <a:avLst/>
@@ -5230,59 +5089,49 @@
           <a:p>
             <a:pPr algn="l"/>
             <a:r>
-              <a:rPr sz="2000" b="1">
-                <a:solidFill>
-                  <a:srgbClr val="3D2B56"/>
-                </a:solidFill>
-                <a:latin typeface="Calibri"/>
-              </a:rPr>
-              <a:t>By age 45, a woman's lifetime risk of Alzheimer's is 1 in 5 — twice a man's.</a:t>
-            </a:r>
-          </a:p>
-        </p:txBody>
-      </p:sp>
-      <p:sp>
-        <p:nvSpPr>
-          <p:cNvPr id="6" name="Rounded Rectangle 5"/>
-          <p:cNvSpPr/>
+              <a:rPr sz="16000" b="1">
+                <a:solidFill>
+                  <a:srgbClr val="E8A838"/>
+                </a:solidFill>
+                <a:latin typeface="Calibri"/>
+              </a:rPr>
+              <a:t>2:1</a:t>
+            </a:r>
+          </a:p>
+        </p:txBody>
+      </p:sp>
+      <p:sp>
+        <p:nvSpPr>
+          <p:cNvPr id="6" name="TextBox 5"/>
+          <p:cNvSpPr txBox="1"/>
           <p:nvPr/>
         </p:nvSpPr>
         <p:spPr>
           <a:xfrm>
-            <a:off x="6949440" y="1188720"/>
-            <a:ext cx="4663440" cy="4937760"/>
-          </a:xfrm>
-          <a:prstGeom prst="roundRect">
-            <a:avLst>
-              <a:gd name="adj" fmla="val 6000"/>
-            </a:avLst>
-          </a:prstGeom>
-          <a:solidFill>
-            <a:srgbClr val="F3EEF8"/>
-          </a:solidFill>
-          <a:ln>
-            <a:noFill/>
-          </a:ln>
-        </p:spPr>
-        <p:style>
-          <a:lnRef idx="1">
-            <a:schemeClr val="accent1"/>
-          </a:lnRef>
-          <a:fillRef idx="3">
-            <a:schemeClr val="accent1"/>
-          </a:fillRef>
-          <a:effectRef idx="2">
-            <a:schemeClr val="accent1"/>
-          </a:effectRef>
-          <a:fontRef idx="minor">
-            <a:schemeClr val="lt1"/>
-          </a:fontRef>
-        </p:style>
-        <p:txBody>
-          <a:bodyPr rtlCol="0" anchor="ctr"/>
-          <a:lstStyle/>
-          <a:p>
-            <a:pPr algn="ctr"/>
+            <a:off x="6583680" y="2194560"/>
+            <a:ext cx="5029200" cy="2194560"/>
+          </a:xfrm>
+          <a:prstGeom prst="rect">
+            <a:avLst/>
+          </a:prstGeom>
+          <a:noFill/>
+        </p:spPr>
+        <p:txBody>
+          <a:bodyPr wrap="square" lIns="0" rIns="0" tIns="0" bIns="0" anchor="t">
+            <a:spAutoFit/>
+          </a:bodyPr>
+          <a:lstStyle/>
+          <a:p>
+            <a:pPr algn="l"/>
+            <a:r>
+              <a:rPr sz="1600" b="0">
+                <a:solidFill>
+                  <a:srgbClr val="2C2C2C"/>
+                </a:solidFill>
+                <a:latin typeface="Calibri"/>
+              </a:rPr>
+              <a:t>A progressive brain disease that destroys memory and thinking — the most common cause of dementia in older adults.</a:t>
+            </a:r>
           </a:p>
         </p:txBody>
       </p:sp>
@@ -5294,8 +5143,8 @@
         </p:nvSpPr>
         <p:spPr>
           <a:xfrm>
-            <a:off x="6949440" y="1554480"/>
-            <a:ext cx="4663440" cy="457200"/>
+            <a:off x="6583680" y="4572000"/>
+            <a:ext cx="5029200" cy="1737360"/>
           </a:xfrm>
           <a:prstGeom prst="rect">
             <a:avLst/>
@@ -5308,15 +5157,15 @@
           </a:bodyPr>
           <a:lstStyle/>
           <a:p>
-            <a:pPr algn="ctr"/>
-            <a:r>
-              <a:rPr sz="1200" b="1">
-                <a:solidFill>
-                  <a:srgbClr val="7B5EA7"/>
-                </a:solidFill>
-                <a:latin typeface="Calibri"/>
-              </a:rPr>
-              <a:t>LIFETIME RISK GAP</a:t>
+            <a:pPr algn="l"/>
+            <a:r>
+              <a:rPr sz="2200" b="1">
+                <a:solidFill>
+                  <a:srgbClr val="3D2B56"/>
+                </a:solidFill>
+                <a:latin typeface="Calibri"/>
+              </a:rPr>
+              <a:t>By age 45, a woman's lifetime risk of Alzheimer's is 1 in 5 — twice a man's.</a:t>
             </a:r>
           </a:p>
         </p:txBody>
@@ -5329,8 +5178,8 @@
         </p:nvSpPr>
         <p:spPr>
           <a:xfrm>
-            <a:off x="6949440" y="2103120"/>
-            <a:ext cx="4663440" cy="1828800"/>
+            <a:off x="457200" y="6446520"/>
+            <a:ext cx="10424160" cy="320040"/>
           </a:xfrm>
           <a:prstGeom prst="rect">
             <a:avLst/>
@@ -5343,15 +5192,15 @@
           </a:bodyPr>
           <a:lstStyle/>
           <a:p>
-            <a:pPr algn="ctr"/>
-            <a:r>
-              <a:rPr sz="13000" b="1">
-                <a:solidFill>
-                  <a:srgbClr val="E8A838"/>
-                </a:solidFill>
-                <a:latin typeface="Calibri"/>
-              </a:rPr>
-              <a:t>2:1</a:t>
+            <a:pPr algn="l"/>
+            <a:r>
+              <a:rPr sz="900" b="0">
+                <a:solidFill>
+                  <a:srgbClr val="888888"/>
+                </a:solidFill>
+                <a:latin typeface="Calibri"/>
+              </a:rPr>
+              <a:t>[4] Alzheimer's disease as a women's health challenge (PMC, 2024)  ·  https://pmc.ncbi.nlm.nih.gov/articles/PMC11106001/</a:t>
             </a:r>
           </a:p>
         </p:txBody>
@@ -5359,111 +5208,6 @@
       <p:sp>
         <p:nvSpPr>
           <p:cNvPr id="9" name="TextBox 8"/>
-          <p:cNvSpPr txBox="1"/>
-          <p:nvPr/>
-        </p:nvSpPr>
-        <p:spPr>
-          <a:xfrm>
-            <a:off x="6949440" y="4114800"/>
-            <a:ext cx="4663440" cy="548640"/>
-          </a:xfrm>
-          <a:prstGeom prst="rect">
-            <a:avLst/>
-          </a:prstGeom>
-          <a:noFill/>
-        </p:spPr>
-        <p:txBody>
-          <a:bodyPr wrap="square" lIns="0" rIns="0" tIns="0" bIns="0" anchor="t">
-            <a:spAutoFit/>
-          </a:bodyPr>
-          <a:lstStyle/>
-          <a:p>
-            <a:pPr algn="ctr"/>
-            <a:r>
-              <a:rPr sz="1600" b="0">
-                <a:solidFill>
-                  <a:srgbClr val="7B5EA7"/>
-                </a:solidFill>
-                <a:latin typeface="Calibri"/>
-              </a:rPr>
-              <a:t>female : male</a:t>
-            </a:r>
-          </a:p>
-        </p:txBody>
-      </p:sp>
-      <p:sp>
-        <p:nvSpPr>
-          <p:cNvPr id="10" name="TextBox 9"/>
-          <p:cNvSpPr txBox="1"/>
-          <p:nvPr/>
-        </p:nvSpPr>
-        <p:spPr>
-          <a:xfrm>
-            <a:off x="6949440" y="4754880"/>
-            <a:ext cx="4663440" cy="1280160"/>
-          </a:xfrm>
-          <a:prstGeom prst="rect">
-            <a:avLst/>
-          </a:prstGeom>
-          <a:noFill/>
-        </p:spPr>
-        <p:txBody>
-          <a:bodyPr wrap="square" lIns="0" rIns="0" tIns="0" bIns="0" anchor="t">
-            <a:spAutoFit/>
-          </a:bodyPr>
-          <a:lstStyle/>
-          <a:p>
-            <a:pPr algn="ctr"/>
-            <a:r>
-              <a:rPr sz="1400" b="0">
-                <a:solidFill>
-                  <a:srgbClr val="2C2C2C"/>
-                </a:solidFill>
-                <a:latin typeface="Calibri"/>
-              </a:rPr>
-              <a:t>1 in 5 women  vs  1 in 10 men carry a lifetime Alzheimer's risk from age 45.</a:t>
-            </a:r>
-          </a:p>
-        </p:txBody>
-      </p:sp>
-      <p:sp>
-        <p:nvSpPr>
-          <p:cNvPr id="11" name="TextBox 10"/>
-          <p:cNvSpPr txBox="1"/>
-          <p:nvPr/>
-        </p:nvSpPr>
-        <p:spPr>
-          <a:xfrm>
-            <a:off x="457200" y="6446520"/>
-            <a:ext cx="10424160" cy="320040"/>
-          </a:xfrm>
-          <a:prstGeom prst="rect">
-            <a:avLst/>
-          </a:prstGeom>
-          <a:noFill/>
-        </p:spPr>
-        <p:txBody>
-          <a:bodyPr wrap="square" lIns="0" rIns="0" tIns="0" bIns="0" anchor="t">
-            <a:spAutoFit/>
-          </a:bodyPr>
-          <a:lstStyle/>
-          <a:p>
-            <a:pPr algn="l"/>
-            <a:r>
-              <a:rPr sz="900" b="0">
-                <a:solidFill>
-                  <a:srgbClr val="888888"/>
-                </a:solidFill>
-                <a:latin typeface="Calibri"/>
-              </a:rPr>
-              <a:t>[4] Alzheimer's disease as a women's health challenge (PMC, 2024)  ·  https://pmc.ncbi.nlm.nih.gov/articles/PMC11106001/</a:t>
-            </a:r>
-          </a:p>
-        </p:txBody>
-      </p:sp>
-      <p:sp>
-        <p:nvSpPr>
-          <p:cNvPr id="12" name="TextBox 11"/>
           <p:cNvSpPr txBox="1"/>
           <p:nvPr/>
         </p:nvSpPr>
@@ -5531,7 +5275,7 @@
         <p:spPr>
           <a:xfrm>
             <a:off x="822960" y="502920"/>
-            <a:ext cx="1828800" cy="365760"/>
+            <a:ext cx="2194560" cy="365760"/>
           </a:xfrm>
           <a:prstGeom prst="roundRect">
             <a:avLst>
@@ -5584,8 +5328,8 @@
         </p:nvSpPr>
         <p:spPr>
           <a:xfrm>
-            <a:off x="822960" y="1828800"/>
-            <a:ext cx="5486400" cy="457200"/>
+            <a:off x="822960" y="1051560"/>
+            <a:ext cx="10515600" cy="822960"/>
           </a:xfrm>
           <a:prstGeom prst="rect">
             <a:avLst/>
@@ -5600,13 +5344,13 @@
           <a:p>
             <a:pPr algn="l"/>
             <a:r>
-              <a:rPr sz="1400" b="0">
-                <a:solidFill>
-                  <a:srgbClr val="7B5EA7"/>
-                </a:solidFill>
-                <a:latin typeface="Calibri"/>
-              </a:rPr>
-              <a:t>female-to-male ratio</a:t>
+              <a:rPr sz="2800" b="1">
+                <a:solidFill>
+                  <a:srgbClr val="3D2B56"/>
+                </a:solidFill>
+                <a:latin typeface="Calibri"/>
+              </a:rPr>
+              <a:t>Major Depression</a:t>
             </a:r>
           </a:p>
         </p:txBody>
@@ -5619,8 +5363,8 @@
         </p:nvSpPr>
         <p:spPr>
           <a:xfrm>
-            <a:off x="822960" y="2286000"/>
-            <a:ext cx="5486400" cy="1828800"/>
+            <a:off x="822960" y="2194560"/>
+            <a:ext cx="5486400" cy="411480"/>
           </a:xfrm>
           <a:prstGeom prst="rect">
             <a:avLst/>
@@ -5635,13 +5379,13 @@
           <a:p>
             <a:pPr algn="l"/>
             <a:r>
-              <a:rPr sz="17000" b="1">
-                <a:solidFill>
-                  <a:srgbClr val="E8A838"/>
-                </a:solidFill>
-                <a:latin typeface="Calibri"/>
-              </a:rPr>
-              <a:t>2:1</a:t>
+              <a:rPr sz="1400" b="0">
+                <a:solidFill>
+                  <a:srgbClr val="7B5EA7"/>
+                </a:solidFill>
+                <a:latin typeface="Calibri"/>
+              </a:rPr>
+              <a:t>female-to-male ratio</a:t>
             </a:r>
           </a:p>
         </p:txBody>
@@ -5654,8 +5398,8 @@
         </p:nvSpPr>
         <p:spPr>
           <a:xfrm>
-            <a:off x="6583680" y="1188720"/>
-            <a:ext cx="5029200" cy="1005840"/>
+            <a:off x="822960" y="2606040"/>
+            <a:ext cx="5486400" cy="1828800"/>
           </a:xfrm>
           <a:prstGeom prst="rect">
             <a:avLst/>
@@ -5670,13 +5414,13 @@
           <a:p>
             <a:pPr algn="l"/>
             <a:r>
-              <a:rPr sz="3000" b="1">
-                <a:solidFill>
-                  <a:srgbClr val="3D2B56"/>
-                </a:solidFill>
-                <a:latin typeface="Calibri"/>
-              </a:rPr>
-              <a:t>Major Depression</a:t>
+              <a:rPr sz="16000" b="1">
+                <a:solidFill>
+                  <a:srgbClr val="E8A838"/>
+                </a:solidFill>
+                <a:latin typeface="Calibri"/>
+              </a:rPr>
+              <a:t>2:1</a:t>
             </a:r>
           </a:p>
         </p:txBody>
@@ -5689,8 +5433,8 @@
         </p:nvSpPr>
         <p:spPr>
           <a:xfrm>
-            <a:off x="6583680" y="2377440"/>
-            <a:ext cx="5029200" cy="1645920"/>
+            <a:off x="6583680" y="2194560"/>
+            <a:ext cx="5029200" cy="2194560"/>
           </a:xfrm>
           <a:prstGeom prst="rect">
             <a:avLst/>
@@ -5724,8 +5468,8 @@
         </p:nvSpPr>
         <p:spPr>
           <a:xfrm>
-            <a:off x="6583680" y="4389120"/>
-            <a:ext cx="5029200" cy="1645920"/>
+            <a:off x="6583680" y="4572000"/>
+            <a:ext cx="5029200" cy="1737360"/>
           </a:xfrm>
           <a:prstGeom prst="rect">
             <a:avLst/>
